--- a/slides/decks/L04-patch.pptx
+++ b/slides/decks/L04-patch.pptx
@@ -118,13 +118,13 @@
   <p:extLst>
     <p:ext uri="{521415D9-36F7-43E2-AB2F-B90AF26B5E84}">
       <p14:sectionLst xmlns:p14="http://schemas.microsoft.com/office/powerpoint/2010/main">
-        <p14:section name="开场" id="{c47e8337-0117-3ea7-7161-484a9963ef94}">
+        <p14:section name="开场" id="{a716366a-93ba-73e4-6855-d8266ede5cc7}">
           <p14:sldIdLst>
             <p14:sldId id="256"/>
             <p14:sldId id="257"/>
           </p14:sldIdLst>
         </p14:section>
-        <p14:section name="讲解" id="{9bda8a3d-1d02-60fa-a7b9-dd3e5d63bf7f}">
+        <p14:section name="讲解" id="{2f4bec6a-08d8-38dd-a3d4-939dcfa5cd73}">
           <p14:sldIdLst>
             <p14:sldId id="258"/>
             <p14:sldId id="259"/>
@@ -135,13 +135,13 @@
             <p14:sldId id="264"/>
           </p14:sldIdLst>
         </p14:section>
-        <p14:section name="练习" id="{1510264f-3364-e8f5-3e1d-e22ffce93db5}">
+        <p14:section name="练习" id="{cd7bc591-a402-25ca-5c7b-5f28bb050455}">
           <p14:sldIdLst>
             <p14:sldId id="265"/>
             <p14:sldId id="266"/>
           </p14:sldIdLst>
         </p14:section>
-        <p14:section name="收束" id="{68deba0f-9b37-1d87-76d1-d6ae6550ab85}">
+        <p14:section name="收束" id="{e6bb7b2a-b6a2-2b7e-d699-2efec14163ff}">
           <p14:sldIdLst>
             <p14:sldId id="267"/>
           </p14:sldIdLst>
